--- a/reports/stage20/presentations/04_TRIEN_KHAI_PHAN_MEM_WORKSPHERE.pptx
+++ b/reports/stage20/presentations/04_TRIEN_KHAI_PHAN_MEM_WORKSPHERE.pptx
@@ -538,7 +538,7 @@
           <a:p/>
           <a:p>
             <a:r>
-              <a:t>THỜI LƯỢNG DỰ KIẾN: 1 phút (PROJECT_PROPOSAL)</a:t>
+              <a:t>THỜI LƯỢNG DỰ KIẾN: 20 giây (~0.3 phút) (PROJECT_PROPOSAL)</a:t>
             </a:r>
           </a:p>
           <a:p>
@@ -650,7 +650,7 @@
           <a:p/>
           <a:p>
             <a:r>
-              <a:t>THỜI LƯỢNG DỰ KIẾN: 1.5 phút (PROJECT_PROPOSAL)</a:t>
+              <a:t>THỜI LƯỢNG DỰ KIẾN: 60 giây (~1.0 phút) (PROJECT_PROPOSAL)</a:t>
             </a:r>
           </a:p>
           <a:p>
@@ -762,7 +762,7 @@
           <a:p/>
           <a:p>
             <a:r>
-              <a:t>THỜI LƯỢNG DỰ KIẾN: 1.5 phút (PROJECT_PROPOSAL)</a:t>
+              <a:t>THỜI LƯỢNG DỰ KIẾN: 65 giây (~1.1 phút) (PROJECT_PROPOSAL)</a:t>
             </a:r>
           </a:p>
           <a:p>
@@ -874,7 +874,7 @@
           <a:p/>
           <a:p>
             <a:r>
-              <a:t>THỜI LƯỢNG DỰ KIẾN: 1.5 phút (PROJECT_PROPOSAL)</a:t>
+              <a:t>THỜI LƯỢNG DỰ KIẾN: 65 giây (~1.1 phút) (PROJECT_PROPOSAL)</a:t>
             </a:r>
           </a:p>
           <a:p>
@@ -986,7 +986,7 @@
           <a:p/>
           <a:p>
             <a:r>
-              <a:t>THỜI LƯỢNG DỰ KIẾN: 1.5 phút (PROJECT_PROPOSAL)</a:t>
+              <a:t>THỜI LƯỢNG DỰ KIẾN: 65 giây (~1.1 phút) (PROJECT_PROPOSAL)</a:t>
             </a:r>
           </a:p>
           <a:p>
@@ -1098,7 +1098,7 @@
           <a:p/>
           <a:p>
             <a:r>
-              <a:t>THỜI LƯỢNG DỰ KIẾN: 1.5 phút (PROJECT_PROPOSAL)</a:t>
+              <a:t>THỜI LƯỢNG DỰ KIẾN: 65 giây (~1.1 phút) (PROJECT_PROPOSAL)</a:t>
             </a:r>
           </a:p>
           <a:p>
@@ -1210,7 +1210,7 @@
           <a:p/>
           <a:p>
             <a:r>
-              <a:t>THỜI LƯỢNG DỰ KIẾN: 1.5 phút (PROJECT_PROPOSAL)</a:t>
+              <a:t>THỜI LƯỢNG DỰ KIẾN: 70 giây (~1.2 phút) (PROJECT_PROPOSAL)</a:t>
             </a:r>
           </a:p>
           <a:p>
@@ -1322,7 +1322,7 @@
           <a:p/>
           <a:p>
             <a:r>
-              <a:t>THỜI LƯỢNG DỰ KIẾN: 1.5 phút (PROJECT_PROPOSAL)</a:t>
+              <a:t>THỜI LƯỢNG DỰ KIẾN: 60 giây (~1.0 phút) (PROJECT_PROPOSAL)</a:t>
             </a:r>
           </a:p>
           <a:p>
@@ -1434,7 +1434,7 @@
           <a:p/>
           <a:p>
             <a:r>
-              <a:t>THỜI LƯỢNG DỰ KIẾN: 1.5 phút (PROJECT_PROPOSAL)</a:t>
+              <a:t>THỜI LƯỢNG DỰ KIẾN: 65 giây (~1.1 phút) (PROJECT_PROPOSAL)</a:t>
             </a:r>
           </a:p>
           <a:p>
@@ -1546,7 +1546,7 @@
           <a:p/>
           <a:p>
             <a:r>
-              <a:t>THỜI LƯỢNG DỰ KIẾN: 1.5 phút (PROJECT_PROPOSAL)</a:t>
+              <a:t>THỜI LƯỢNG DỰ KIẾN: 55 giây (~0.9 phút) (PROJECT_PROPOSAL)</a:t>
             </a:r>
           </a:p>
           <a:p>
@@ -1658,7 +1658,7 @@
           <a:p/>
           <a:p>
             <a:r>
-              <a:t>THỜI LƯỢNG DỰ KIẾN: 1.5 phút (PROJECT_PROPOSAL)</a:t>
+              <a:t>THỜI LƯỢNG DỰ KIẾN: 50 giây (~0.8 phút) (PROJECT_PROPOSAL)</a:t>
             </a:r>
           </a:p>
           <a:p>
@@ -1770,7 +1770,7 @@
           <a:p/>
           <a:p>
             <a:r>
-              <a:t>THỜI LƯỢNG DỰ KIẾN: 1.5 phút (PROJECT_PROPOSAL)</a:t>
+              <a:t>THỜI LƯỢNG DỰ KIẾN: 60 giây (~1.0 phút) (PROJECT_PROPOSAL)</a:t>
             </a:r>
           </a:p>
           <a:p>
@@ -1882,7 +1882,7 @@
           <a:p/>
           <a:p>
             <a:r>
-              <a:t>THỜI LƯỢNG DỰ KIẾN: 1 phút (PROJECT_PROPOSAL)</a:t>
+              <a:t>THỜI LƯỢNG DỰ KIẾN: 30 giây (~0.5 phút) (PROJECT_PROPOSAL)</a:t>
             </a:r>
           </a:p>
           <a:p>
@@ -1994,7 +1994,7 @@
           <a:p/>
           <a:p>
             <a:r>
-              <a:t>THỜI LƯỢNG DỰ KIẾN: 1.5 phút (PROJECT_PROPOSAL)</a:t>
+              <a:t>THỜI LƯỢNG DỰ KIẾN: 50 giây (~0.8 phút) (PROJECT_PROPOSAL)</a:t>
             </a:r>
           </a:p>
           <a:p>
@@ -2106,7 +2106,7 @@
           <a:p/>
           <a:p>
             <a:r>
-              <a:t>THỜI LƯỢNG DỰ KIẾN: 1.5 phút (PROJECT_PROPOSAL)</a:t>
+              <a:t>THỜI LƯỢNG DỰ KIẾN: 50 giây (~0.8 phút) (PROJECT_PROPOSAL)</a:t>
             </a:r>
           </a:p>
           <a:p>
@@ -2218,7 +2218,7 @@
           <a:p/>
           <a:p>
             <a:r>
-              <a:t>THỜI LƯỢNG DỰ KIẾN: 1.5 phút (PROJECT_PROPOSAL)</a:t>
+              <a:t>THỜI LƯỢNG DỰ KIẾN: 80 giây (~1.3 phút) (PROJECT_PROPOSAL)</a:t>
             </a:r>
           </a:p>
           <a:p>
@@ -2330,7 +2330,7 @@
           <a:p/>
           <a:p>
             <a:r>
-              <a:t>THỜI LƯỢNG DỰ KIẾN: 1.5 phút (PROJECT_PROPOSAL)</a:t>
+              <a:t>THỜI LƯỢNG DỰ KIẾN: 65 giây (~1.1 phút) (PROJECT_PROPOSAL)</a:t>
             </a:r>
           </a:p>
           <a:p>
@@ -2442,7 +2442,7 @@
           <a:p/>
           <a:p>
             <a:r>
-              <a:t>THỜI LƯỢNG DỰ KIẾN: 1.5 phút (PROJECT_PROPOSAL)</a:t>
+              <a:t>THỜI LƯỢNG DỰ KIẾN: 55 giây (~0.9 phút) (PROJECT_PROPOSAL)</a:t>
             </a:r>
           </a:p>
           <a:p>
@@ -2554,7 +2554,7 @@
           <a:p/>
           <a:p>
             <a:r>
-              <a:t>THỜI LƯỢNG DỰ KIẾN: 1.5 phút (PROJECT_PROPOSAL)</a:t>
+              <a:t>THỜI LƯỢNG DỰ KIẾN: 75 giây (~1.2 phút) (PROJECT_PROPOSAL)</a:t>
             </a:r>
           </a:p>
           <a:p>
@@ -2666,7 +2666,7 @@
           <a:p/>
           <a:p>
             <a:r>
-              <a:t>THỜI LƯỢNG DỰ KIẾN: 1.5 phút (PROJECT_PROPOSAL)</a:t>
+              <a:t>THỜI LƯỢNG DỰ KIẾN: 75 giây (~1.2 phút) (PROJECT_PROPOSAL)</a:t>
             </a:r>
           </a:p>
           <a:p>

--- a/reports/stage20/presentations/04_TRIEN_KHAI_PHAN_MEM_WORKSPHERE.pptx
+++ b/reports/stage20/presentations/04_TRIEN_KHAI_PHAN_MEM_WORKSPHERE.pptx
@@ -650,7 +650,7 @@
           <a:p/>
           <a:p>
             <a:r>
-              <a:t>THỜI LƯỢNG DỰ KIẾN: 60 giây (~1.0 phút) (PROJECT_PROPOSAL)</a:t>
+              <a:t>THỜI LƯỢNG DỰ KIẾN: 45 giây (~0.8 phút) (PROJECT_PROPOSAL)</a:t>
             </a:r>
           </a:p>
           <a:p>
@@ -762,7 +762,7 @@
           <a:p/>
           <a:p>
             <a:r>
-              <a:t>THỜI LƯỢNG DỰ KIẾN: 65 giây (~1.1 phút) (PROJECT_PROPOSAL)</a:t>
+              <a:t>THỜI LƯỢNG DỰ KIẾN: 45 giây (~0.8 phút) (PROJECT_PROPOSAL)</a:t>
             </a:r>
           </a:p>
           <a:p>
@@ -874,7 +874,7 @@
           <a:p/>
           <a:p>
             <a:r>
-              <a:t>THỜI LƯỢNG DỰ KIẾN: 65 giây (~1.1 phút) (PROJECT_PROPOSAL)</a:t>
+              <a:t>THỜI LƯỢNG DỰ KIẾN: 45 giây (~0.8 phút) (PROJECT_PROPOSAL)</a:t>
             </a:r>
           </a:p>
           <a:p>
@@ -986,7 +986,7 @@
           <a:p/>
           <a:p>
             <a:r>
-              <a:t>THỜI LƯỢNG DỰ KIẾN: 65 giây (~1.1 phút) (PROJECT_PROPOSAL)</a:t>
+              <a:t>THỜI LƯỢNG DỰ KIẾN: 45 giây (~0.8 phút) (PROJECT_PROPOSAL)</a:t>
             </a:r>
           </a:p>
           <a:p>
@@ -1098,7 +1098,7 @@
           <a:p/>
           <a:p>
             <a:r>
-              <a:t>THỜI LƯỢNG DỰ KIẾN: 65 giây (~1.1 phút) (PROJECT_PROPOSAL)</a:t>
+              <a:t>THỜI LƯỢNG DỰ KIẾN: 45 giây (~0.8 phút) (PROJECT_PROPOSAL)</a:t>
             </a:r>
           </a:p>
           <a:p>
@@ -1210,7 +1210,7 @@
           <a:p/>
           <a:p>
             <a:r>
-              <a:t>THỜI LƯỢNG DỰ KIẾN: 70 giây (~1.2 phút) (PROJECT_PROPOSAL)</a:t>
+              <a:t>THỜI LƯỢNG DỰ KIẾN: 50 giây (~0.8 phút) (PROJECT_PROPOSAL)</a:t>
             </a:r>
           </a:p>
           <a:p>
@@ -1322,7 +1322,7 @@
           <a:p/>
           <a:p>
             <a:r>
-              <a:t>THỜI LƯỢNG DỰ KIẾN: 60 giây (~1.0 phút) (PROJECT_PROPOSAL)</a:t>
+              <a:t>THỜI LƯỢNG DỰ KIẾN: 45 giây (~0.8 phút) (PROJECT_PROPOSAL)</a:t>
             </a:r>
           </a:p>
           <a:p>
@@ -1434,7 +1434,7 @@
           <a:p/>
           <a:p>
             <a:r>
-              <a:t>THỜI LƯỢNG DỰ KIẾN: 65 giây (~1.1 phút) (PROJECT_PROPOSAL)</a:t>
+              <a:t>THỜI LƯỢNG DỰ KIẾN: 45 giây (~0.8 phút) (PROJECT_PROPOSAL)</a:t>
             </a:r>
           </a:p>
           <a:p>
@@ -1546,7 +1546,7 @@
           <a:p/>
           <a:p>
             <a:r>
-              <a:t>THỜI LƯỢNG DỰ KIẾN: 55 giây (~0.9 phút) (PROJECT_PROPOSAL)</a:t>
+              <a:t>THỜI LƯỢNG DỰ KIẾN: 45 giây (~0.8 phút) (PROJECT_PROPOSAL)</a:t>
             </a:r>
           </a:p>
           <a:p>
@@ -1658,7 +1658,7 @@
           <a:p/>
           <a:p>
             <a:r>
-              <a:t>THỜI LƯỢNG DỰ KIẾN: 50 giây (~0.8 phút) (PROJECT_PROPOSAL)</a:t>
+              <a:t>THỜI LƯỢNG DỰ KIẾN: 40 giây (~0.7 phút) (PROJECT_PROPOSAL)</a:t>
             </a:r>
           </a:p>
           <a:p>
@@ -1770,7 +1770,7 @@
           <a:p/>
           <a:p>
             <a:r>
-              <a:t>THỜI LƯỢNG DỰ KIẾN: 60 giây (~1.0 phút) (PROJECT_PROPOSAL)</a:t>
+              <a:t>THỜI LƯỢNG DỰ KIẾN: 45 giây (~0.8 phút) (PROJECT_PROPOSAL)</a:t>
             </a:r>
           </a:p>
           <a:p>
@@ -1882,7 +1882,7 @@
           <a:p/>
           <a:p>
             <a:r>
-              <a:t>THỜI LƯỢNG DỰ KIẾN: 30 giây (~0.5 phút) (PROJECT_PROPOSAL)</a:t>
+              <a:t>THỜI LƯỢNG DỰ KIẾN: 25 giây (~0.4 phút) (PROJECT_PROPOSAL)</a:t>
             </a:r>
           </a:p>
           <a:p>
@@ -1994,7 +1994,7 @@
           <a:p/>
           <a:p>
             <a:r>
-              <a:t>THỜI LƯỢNG DỰ KIẾN: 50 giây (~0.8 phút) (PROJECT_PROPOSAL)</a:t>
+              <a:t>THỜI LƯỢNG DỰ KIẾN: 40 giây (~0.7 phút) (PROJECT_PROPOSAL)</a:t>
             </a:r>
           </a:p>
           <a:p>
@@ -2106,7 +2106,7 @@
           <a:p/>
           <a:p>
             <a:r>
-              <a:t>THỜI LƯỢNG DỰ KIẾN: 50 giây (~0.8 phút) (PROJECT_PROPOSAL)</a:t>
+              <a:t>THỜI LƯỢNG DỰ KIẾN: 40 giây (~0.7 phút) (PROJECT_PROPOSAL)</a:t>
             </a:r>
           </a:p>
           <a:p>
@@ -2218,7 +2218,7 @@
           <a:p/>
           <a:p>
             <a:r>
-              <a:t>THỜI LƯỢNG DỰ KIẾN: 80 giây (~1.3 phút) (PROJECT_PROPOSAL)</a:t>
+              <a:t>THỜI LƯỢNG DỰ KIẾN: 60 giây (~1.0 phút) (PROJECT_PROPOSAL)</a:t>
             </a:r>
           </a:p>
           <a:p>
@@ -2330,7 +2330,7 @@
           <a:p/>
           <a:p>
             <a:r>
-              <a:t>THỜI LƯỢNG DỰ KIẾN: 65 giây (~1.1 phút) (PROJECT_PROPOSAL)</a:t>
+              <a:t>THỜI LƯỢNG DỰ KIẾN: 50 giây (~0.8 phút) (PROJECT_PROPOSAL)</a:t>
             </a:r>
           </a:p>
           <a:p>
@@ -2442,7 +2442,7 @@
           <a:p/>
           <a:p>
             <a:r>
-              <a:t>THỜI LƯỢNG DỰ KIẾN: 55 giây (~0.9 phút) (PROJECT_PROPOSAL)</a:t>
+              <a:t>THỜI LƯỢNG DỰ KIẾN: 45 giây (~0.8 phút) (PROJECT_PROPOSAL)</a:t>
             </a:r>
           </a:p>
           <a:p>
@@ -2554,7 +2554,7 @@
           <a:p/>
           <a:p>
             <a:r>
-              <a:t>THỜI LƯỢNG DỰ KIẾN: 75 giây (~1.2 phút) (PROJECT_PROPOSAL)</a:t>
+              <a:t>THỜI LƯỢNG DỰ KIẾN: 55 giây (~0.9 phút) (PROJECT_PROPOSAL)</a:t>
             </a:r>
           </a:p>
           <a:p>
@@ -2666,7 +2666,7 @@
           <a:p/>
           <a:p>
             <a:r>
-              <a:t>THỜI LƯỢNG DỰ KIẾN: 75 giây (~1.2 phút) (PROJECT_PROPOSAL)</a:t>
+              <a:t>THỜI LƯỢNG DỰ KIẾN: 55 giây (~0.9 phút) (PROJECT_PROPOSAL)</a:t>
             </a:r>
           </a:p>
           <a:p>
